--- a/03-agentic-tool-loop.pptx
+++ b/03-agentic-tool-loop.pptx
@@ -3365,8 +3365,8 @@
         </p:nvSpPr>
         <p:spPr>
           <a:xfrm>
-            <a:off x="6035040" y="4114800"/>
-            <a:ext cx="2948939" cy="754380"/>
+            <a:off x="582930" y="2948939"/>
+            <a:ext cx="4800600" cy="788669"/>
           </a:xfrm>
           <a:prstGeom prst="roundRect">
             <a:avLst>
@@ -3413,8 +3413,8 @@
         </p:nvSpPr>
         <p:spPr>
           <a:xfrm>
-            <a:off x="6137909" y="4149089"/>
-            <a:ext cx="2743200" cy="342900"/>
+            <a:off x="754380" y="3017520"/>
+            <a:ext cx="4457700" cy="377190"/>
           </a:xfrm>
           <a:prstGeom prst="rect">
             <a:avLst/>
@@ -3427,15 +3427,15 @@
           </a:bodyPr>
           <a:lstStyle/>
           <a:p>
-            <a:pPr algn="ctr"/>
-            <a:r>
-              <a:rPr sz="1200" b="1" i="0">
+            <a:pPr algn="l"/>
+            <a:r>
+              <a:rPr sz="1650" b="1" i="0">
                 <a:solidFill>
                   <a:srgbClr val="5B3ED9"/>
                 </a:solidFill>
                 <a:latin typeface="Arial Black"/>
               </a:rPr>
-              <a:t>從一次回答 → 多輪迭代</a:t>
+              <a:t>從一次回答  →  多輪迭代</a:t>
             </a:r>
           </a:p>
         </p:txBody>
@@ -3448,8 +3448,8 @@
         </p:nvSpPr>
         <p:spPr>
           <a:xfrm>
-            <a:off x="6137909" y="4457700"/>
-            <a:ext cx="2743200" cy="342900"/>
+            <a:off x="754380" y="3394710"/>
+            <a:ext cx="4457700" cy="308610"/>
           </a:xfrm>
           <a:prstGeom prst="rect">
             <a:avLst/>
@@ -3462,9 +3462,9 @@
           </a:bodyPr>
           <a:lstStyle/>
           <a:p>
-            <a:pPr algn="ctr"/>
-            <a:r>
-              <a:rPr sz="975" b="0" i="0">
+            <a:pPr algn="l"/>
+            <a:r>
+              <a:rPr sz="1125" b="0" i="0">
                 <a:solidFill>
                   <a:srgbClr val="1F2937"/>
                 </a:solidFill>
@@ -3930,7 +3930,7 @@
             <a:r>
               <a:rPr sz="975" b="1" i="0">
                 <a:solidFill>
-                  <a:srgbClr val="FB7048"/>
+                  <a:srgbClr val="374151"/>
                 </a:solidFill>
                 <a:latin typeface="Consolas"/>
               </a:rPr>
@@ -4184,7 +4184,7 @@
             <a:r>
               <a:rPr sz="975" b="1" i="0">
                 <a:solidFill>
-                  <a:srgbClr val="7B5CF5"/>
+                  <a:srgbClr val="374151"/>
                 </a:solidFill>
                 <a:latin typeface="Consolas"/>
               </a:rPr>
@@ -4438,7 +4438,7 @@
             <a:r>
               <a:rPr sz="975" b="1" i="0">
                 <a:solidFill>
-                  <a:srgbClr val="0EA594"/>
+                  <a:srgbClr val="374151"/>
                 </a:solidFill>
                 <a:latin typeface="Consolas"/>
               </a:rPr>
@@ -4617,7 +4617,7 @@
                 </a:solidFill>
                 <a:latin typeface="Calibri"/>
               </a:rPr>
-              <a:t>01 · ①   S I N G L E - T U R N   解 不 了</a:t>
+              <a:t>01 · ①   S I N G L E - T U R N · 解不了</a:t>
             </a:r>
           </a:p>
         </p:txBody>
@@ -4701,7 +4701,7 @@
         <p:spPr>
           <a:xfrm>
             <a:off x="377190" y="1851660"/>
-            <a:ext cx="2708910" cy="2537460"/>
+            <a:ext cx="2708910" cy="2263139"/>
           </a:xfrm>
           <a:prstGeom prst="roundRect">
             <a:avLst>
@@ -4799,7 +4799,7 @@
           <a:p>
             <a:pPr algn="l"/>
             <a:r>
-              <a:rPr sz="975" b="0" i="1">
+              <a:rPr sz="1125" b="1" i="0">
                 <a:solidFill>
                   <a:srgbClr val="1F2937"/>
                 </a:solidFill>
@@ -4818,8 +4818,8 @@
         </p:nvSpPr>
         <p:spPr>
           <a:xfrm>
-            <a:off x="548640" y="3497579"/>
-            <a:ext cx="2366010" cy="822959"/>
+            <a:off x="548640" y="3326129"/>
+            <a:ext cx="2366010" cy="754380"/>
           </a:xfrm>
           <a:prstGeom prst="rect">
             <a:avLst/>
@@ -4834,7 +4834,7 @@
           <a:p>
             <a:pPr algn="l"/>
             <a:r>
-              <a:rPr sz="975" b="0" i="0">
+              <a:rPr sz="900" b="0" i="1">
                 <a:solidFill>
                   <a:srgbClr val="374151"/>
                 </a:solidFill>
@@ -4854,7 +4854,7 @@
         <p:spPr>
           <a:xfrm>
             <a:off x="3223260" y="1851660"/>
-            <a:ext cx="2708910" cy="2537460"/>
+            <a:ext cx="2708910" cy="2263139"/>
           </a:xfrm>
           <a:prstGeom prst="roundRect">
             <a:avLst>
@@ -4952,7 +4952,7 @@
           <a:p>
             <a:pPr algn="l"/>
             <a:r>
-              <a:rPr sz="975" b="0" i="1">
+              <a:rPr sz="1125" b="1" i="0">
                 <a:solidFill>
                   <a:srgbClr val="1F2937"/>
                 </a:solidFill>
@@ -4971,8 +4971,8 @@
         </p:nvSpPr>
         <p:spPr>
           <a:xfrm>
-            <a:off x="3394710" y="3497579"/>
-            <a:ext cx="2366010" cy="822959"/>
+            <a:off x="3394710" y="3326129"/>
+            <a:ext cx="2366010" cy="754380"/>
           </a:xfrm>
           <a:prstGeom prst="rect">
             <a:avLst/>
@@ -4987,7 +4987,7 @@
           <a:p>
             <a:pPr algn="l"/>
             <a:r>
-              <a:rPr sz="975" b="0" i="0">
+              <a:rPr sz="900" b="0" i="1">
                 <a:solidFill>
                   <a:srgbClr val="374151"/>
                 </a:solidFill>
@@ -5007,7 +5007,7 @@
         <p:spPr>
           <a:xfrm>
             <a:off x="6069330" y="1851660"/>
-            <a:ext cx="2708910" cy="2537460"/>
+            <a:ext cx="2708910" cy="2263139"/>
           </a:xfrm>
           <a:prstGeom prst="roundRect">
             <a:avLst>
@@ -5105,7 +5105,7 @@
           <a:p>
             <a:pPr algn="l"/>
             <a:r>
-              <a:rPr sz="975" b="0" i="1">
+              <a:rPr sz="1125" b="1" i="0">
                 <a:solidFill>
                   <a:srgbClr val="1F2937"/>
                 </a:solidFill>
@@ -5124,8 +5124,8 @@
         </p:nvSpPr>
         <p:spPr>
           <a:xfrm>
-            <a:off x="6240780" y="3497579"/>
-            <a:ext cx="2366010" cy="822959"/>
+            <a:off x="6240780" y="3326129"/>
+            <a:ext cx="2366010" cy="754380"/>
           </a:xfrm>
           <a:prstGeom prst="rect">
             <a:avLst/>
@@ -5140,7 +5140,7 @@
           <a:p>
             <a:pPr algn="l"/>
             <a:r>
-              <a:rPr sz="975" b="0" i="0">
+              <a:rPr sz="900" b="0" i="1">
                 <a:solidFill>
                   <a:srgbClr val="374151"/>
                 </a:solidFill>
@@ -5159,7 +5159,7 @@
         </p:nvSpPr>
         <p:spPr>
           <a:xfrm>
-            <a:off x="582930" y="4526279"/>
+            <a:off x="582930" y="4286250"/>
             <a:ext cx="8229600" cy="377190"/>
           </a:xfrm>
           <a:prstGeom prst="roundRect">
@@ -5207,7 +5207,7 @@
         </p:nvSpPr>
         <p:spPr>
           <a:xfrm>
-            <a:off x="788669" y="4526279"/>
+            <a:off x="788669" y="4286250"/>
             <a:ext cx="7818120" cy="377190"/>
           </a:xfrm>
           <a:prstGeom prst="rect">
@@ -5404,7 +5404,7 @@
                 </a:solidFill>
                 <a:latin typeface="Calibri"/>
               </a:rPr>
-              <a:t>01 · ③   A G E N T I C   解 法   預 覽</a:t>
+              <a:t>01 · ③   A G E N T I C · 解法預覽</a:t>
             </a:r>
           </a:p>
         </p:txBody>
@@ -5536,7 +5536,7 @@
         <p:spPr>
           <a:xfrm>
             <a:off x="548640" y="1954530"/>
-            <a:ext cx="685800" cy="219456"/>
+            <a:ext cx="822959" cy="288036"/>
           </a:xfrm>
           <a:prstGeom prst="rect">
             <a:avLst/>
@@ -5580,7 +5580,7 @@
         <p:spPr>
           <a:xfrm>
             <a:off x="548640" y="1954530"/>
-            <a:ext cx="685800" cy="219456"/>
+            <a:ext cx="822959" cy="288036"/>
           </a:xfrm>
           <a:prstGeom prst="rect">
             <a:avLst/>
@@ -5595,7 +5595,7 @@
           <a:p>
             <a:pPr algn="ctr"/>
             <a:r>
-              <a:rPr sz="750" b="1" i="0">
+              <a:rPr sz="900" b="1" i="0">
                 <a:solidFill>
                   <a:srgbClr val="FFFFFF"/>
                 </a:solidFill>
@@ -5770,7 +5770,7 @@
         <p:spPr>
           <a:xfrm>
             <a:off x="2674620" y="1954530"/>
-            <a:ext cx="685800" cy="219456"/>
+            <a:ext cx="822959" cy="288036"/>
           </a:xfrm>
           <a:prstGeom prst="rect">
             <a:avLst/>
@@ -5814,7 +5814,7 @@
         <p:spPr>
           <a:xfrm>
             <a:off x="2674620" y="1954530"/>
-            <a:ext cx="685800" cy="219456"/>
+            <a:ext cx="822959" cy="288036"/>
           </a:xfrm>
           <a:prstGeom prst="rect">
             <a:avLst/>
@@ -5829,7 +5829,7 @@
           <a:p>
             <a:pPr algn="ctr"/>
             <a:r>
-              <a:rPr sz="750" b="1" i="0">
+              <a:rPr sz="900" b="1" i="0">
                 <a:solidFill>
                   <a:srgbClr val="FFFFFF"/>
                 </a:solidFill>
@@ -6004,7 +6004,7 @@
         <p:spPr>
           <a:xfrm>
             <a:off x="4800600" y="1954530"/>
-            <a:ext cx="685800" cy="219456"/>
+            <a:ext cx="822959" cy="288036"/>
           </a:xfrm>
           <a:prstGeom prst="rect">
             <a:avLst/>
@@ -6048,7 +6048,7 @@
         <p:spPr>
           <a:xfrm>
             <a:off x="4800600" y="1954530"/>
-            <a:ext cx="685800" cy="219456"/>
+            <a:ext cx="822959" cy="288036"/>
           </a:xfrm>
           <a:prstGeom prst="rect">
             <a:avLst/>
@@ -6063,7 +6063,7 @@
           <a:p>
             <a:pPr algn="ctr"/>
             <a:r>
-              <a:rPr sz="750" b="1" i="0">
+              <a:rPr sz="900" b="1" i="0">
                 <a:solidFill>
                   <a:srgbClr val="FFFFFF"/>
                 </a:solidFill>
@@ -6198,11 +6198,11 @@
             </a:avLst>
           </a:prstGeom>
           <a:solidFill>
-            <a:srgbClr val="D4F7F0"/>
+            <a:srgbClr val="EEE8FF"/>
           </a:solidFill>
           <a:ln w="19050">
             <a:solidFill>
-              <a:srgbClr val="0F766E"/>
+              <a:srgbClr val="5B3ED9"/>
             </a:solidFill>
           </a:ln>
           <a:effectLst/>
@@ -6238,13 +6238,13 @@
         <p:spPr>
           <a:xfrm>
             <a:off x="6926580" y="1954530"/>
-            <a:ext cx="685800" cy="219456"/>
+            <a:ext cx="822959" cy="288036"/>
           </a:xfrm>
           <a:prstGeom prst="rect">
             <a:avLst/>
           </a:prstGeom>
           <a:solidFill>
-            <a:srgbClr val="0F766E"/>
+            <a:srgbClr val="5B3ED9"/>
           </a:solidFill>
           <a:ln>
             <a:noFill/>
@@ -6282,7 +6282,7 @@
         <p:spPr>
           <a:xfrm>
             <a:off x="6926580" y="1954530"/>
-            <a:ext cx="685800" cy="219456"/>
+            <a:ext cx="822959" cy="288036"/>
           </a:xfrm>
           <a:prstGeom prst="rect">
             <a:avLst/>
@@ -6297,7 +6297,7 @@
           <a:p>
             <a:pPr algn="ctr"/>
             <a:r>
-              <a:rPr sz="750" b="1" i="0">
+              <a:rPr sz="900" b="1" i="0">
                 <a:solidFill>
                   <a:srgbClr val="FFFFFF"/>
                 </a:solidFill>
@@ -6405,7 +6405,7 @@
             <a:r>
               <a:rPr sz="750" b="1" i="1">
                 <a:solidFill>
-                  <a:srgbClr val="0F766E"/>
+                  <a:srgbClr val="5B3ED9"/>
                 </a:solidFill>
                 <a:latin typeface="Consolas"/>
               </a:rPr>
@@ -6584,7 +6584,7 @@
                 </a:solidFill>
                 <a:latin typeface="Calibri"/>
               </a:rPr>
-              <a:t>01 · ①   A G E N T I C   L O O P   ·   概 念 圖</a:t>
+              <a:t>01 · ①   A G E N T I C   L O O P · 概念圖</a:t>
             </a:r>
           </a:p>
         </p:txBody>
@@ -6767,9 +6767,9 @@
           <a:p>
             <a:pPr algn="ctr"/>
             <a:r>
-              <a:rPr sz="1350" b="1" i="0">
-                <a:solidFill>
-                  <a:srgbClr val="9CA3AF"/>
+              <a:rPr sz="1650" b="1" i="0">
+                <a:solidFill>
+                  <a:srgbClr val="7B5CF5"/>
                 </a:solidFill>
                 <a:latin typeface="Arial Black"/>
               </a:rPr>
@@ -6886,9 +6886,9 @@
           <a:p>
             <a:pPr algn="ctr"/>
             <a:r>
-              <a:rPr sz="1350" b="1" i="0">
-                <a:solidFill>
-                  <a:srgbClr val="9CA3AF"/>
+              <a:rPr sz="1650" b="1" i="0">
+                <a:solidFill>
+                  <a:srgbClr val="FB7048"/>
                 </a:solidFill>
                 <a:latin typeface="Arial Black"/>
               </a:rPr>
@@ -7005,9 +7005,9 @@
           <a:p>
             <a:pPr algn="ctr"/>
             <a:r>
-              <a:rPr sz="1350" b="1" i="0">
-                <a:solidFill>
-                  <a:srgbClr val="9CA3AF"/>
+              <a:rPr sz="1650" b="1" i="0">
+                <a:solidFill>
+                  <a:srgbClr val="FB7048"/>
                 </a:solidFill>
                 <a:latin typeface="Arial Black"/>
               </a:rPr>
@@ -7124,9 +7124,9 @@
           <a:p>
             <a:pPr algn="ctr"/>
             <a:r>
-              <a:rPr sz="1350" b="1" i="0">
-                <a:solidFill>
-                  <a:srgbClr val="9CA3AF"/>
+              <a:rPr sz="1650" b="1" i="0">
+                <a:solidFill>
+                  <a:srgbClr val="0EA594"/>
                 </a:solidFill>
                 <a:latin typeface="Arial Black"/>
               </a:rPr>
@@ -7660,7 +7660,7 @@
                 </a:solidFill>
                 <a:latin typeface="Calibri"/>
               </a:rPr>
-              <a:t>03 · ①   M A X _ I T E R A T I O N S   ·   強 制 回 覆</a:t>
+              <a:t>03 · ①   M A X _ I T E R A T I O N S · 強制回覆</a:t>
             </a:r>
           </a:p>
         </p:txBody>
@@ -8080,11 +8080,11 @@
               </a:spcAft>
             </a:pPr>
             <a:r>
-              <a:rPr sz="900" b="1" i="1">
+              <a:rPr sz="975" b="0" i="1">
                 <a:solidFill>
                   <a:srgbClr val="0F766E"/>
                 </a:solidFill>
-                <a:latin typeface="Consolas"/>
+                <a:latin typeface="Calibri"/>
               </a:rPr>
               <a:t>「請不要再使用任何工具,</a:t>
             </a:r>
@@ -8096,11 +8096,11 @@
               </a:spcAft>
             </a:pPr>
             <a:r>
-              <a:rPr sz="900" b="1" i="1">
+              <a:rPr sz="975" b="0" i="1">
                 <a:solidFill>
                   <a:srgbClr val="0F766E"/>
                 </a:solidFill>
-                <a:latin typeface="Consolas"/>
+                <a:latin typeface="Calibri"/>
               </a:rPr>
               <a:t>  直接根據工具回傳的資料整理 Markdown 回覆。」</a:t>
             </a:r>
@@ -8205,13 +8205,92 @@
       </p:sp>
       <p:sp>
         <p:nvSpPr>
-          <p:cNvPr id="3" name="TextBox 2"/>
-          <p:cNvSpPr txBox="1"/>
-          <p:nvPr/>
-        </p:nvSpPr>
-        <p:spPr>
-          <a:xfrm>
-            <a:off x="582930" y="480059"/>
+          <p:cNvPr id="3" name="Oval 2"/>
+          <p:cNvSpPr/>
+          <p:nvPr/>
+        </p:nvSpPr>
+        <p:spPr>
+          <a:xfrm>
+            <a:off x="445769" y="240030"/>
+            <a:ext cx="274320" cy="274320"/>
+          </a:xfrm>
+          <a:prstGeom prst="ellipse">
+            <a:avLst/>
+          </a:prstGeom>
+          <a:solidFill>
+            <a:srgbClr val="FB7048"/>
+          </a:solidFill>
+          <a:ln>
+            <a:noFill/>
+          </a:ln>
+          <a:effectLst/>
+        </p:spPr>
+        <p:style>
+          <a:lnRef idx="1">
+            <a:schemeClr val="accent1"/>
+          </a:lnRef>
+          <a:fillRef idx="3">
+            <a:schemeClr val="accent1"/>
+          </a:fillRef>
+          <a:effectRef idx="2">
+            <a:schemeClr val="accent1"/>
+          </a:effectRef>
+          <a:fontRef idx="minor">
+            <a:schemeClr val="lt1"/>
+          </a:fontRef>
+        </p:style>
+        <p:txBody>
+          <a:bodyPr rtlCol="0" anchor="ctr"/>
+          <a:lstStyle/>
+          <a:p>
+            <a:pPr algn="ctr"/>
+          </a:p>
+        </p:txBody>
+      </p:sp>
+      <p:sp>
+        <p:nvSpPr>
+          <p:cNvPr id="4" name="TextBox 3"/>
+          <p:cNvSpPr txBox="1"/>
+          <p:nvPr/>
+        </p:nvSpPr>
+        <p:spPr>
+          <a:xfrm>
+            <a:off x="822959" y="205739"/>
+            <a:ext cx="8229600" cy="377190"/>
+          </a:xfrm>
+          <a:prstGeom prst="rect">
+            <a:avLst/>
+          </a:prstGeom>
+          <a:noFill/>
+        </p:spPr>
+        <p:txBody>
+          <a:bodyPr wrap="square" lIns="27432" rIns="27432" tIns="13716" bIns="13716" anchor="ctr">
+            <a:spAutoFit/>
+          </a:bodyPr>
+          <a:lstStyle/>
+          <a:p>
+            <a:pPr algn="l"/>
+            <a:r>
+              <a:rPr sz="1050" b="1" i="0">
+                <a:solidFill>
+                  <a:srgbClr val="CBD5E1"/>
+                </a:solidFill>
+                <a:latin typeface="Calibri"/>
+              </a:rPr>
+              <a:t>04   L I V E   D E M O</a:t>
+            </a:r>
+          </a:p>
+        </p:txBody>
+      </p:sp>
+      <p:sp>
+        <p:nvSpPr>
+          <p:cNvPr id="5" name="TextBox 4"/>
+          <p:cNvSpPr txBox="1"/>
+          <p:nvPr/>
+        </p:nvSpPr>
+        <p:spPr>
+          <a:xfrm>
+            <a:off x="582930" y="720090"/>
             <a:ext cx="8229600" cy="582930"/>
           </a:xfrm>
           <a:prstGeom prst="rect">
@@ -8225,9 +8304,9 @@
           </a:bodyPr>
           <a:lstStyle/>
           <a:p>
-            <a:pPr algn="ctr"/>
-            <a:r>
-              <a:rPr sz="3450" b="1" i="0">
+            <a:pPr algn="l"/>
+            <a:r>
+              <a:rPr sz="3300" b="1" i="0">
                 <a:solidFill>
                   <a:srgbClr val="FB7048"/>
                 </a:solidFill>
@@ -8240,13 +8319,13 @@
       </p:sp>
       <p:sp>
         <p:nvSpPr>
-          <p:cNvPr id="4" name="TextBox 3"/>
-          <p:cNvSpPr txBox="1"/>
-          <p:nvPr/>
-        </p:nvSpPr>
-        <p:spPr>
-          <a:xfrm>
-            <a:off x="582930" y="1200150"/>
+          <p:cNvPr id="6" name="TextBox 5"/>
+          <p:cNvSpPr txBox="1"/>
+          <p:nvPr/>
+        </p:nvSpPr>
+        <p:spPr>
+          <a:xfrm>
+            <a:off x="582930" y="1405889"/>
             <a:ext cx="8229600" cy="308610"/>
           </a:xfrm>
           <a:prstGeom prst="rect">
@@ -8260,11 +8339,11 @@
           </a:bodyPr>
           <a:lstStyle/>
           <a:p>
-            <a:pPr algn="ctr"/>
+            <a:pPr algn="l"/>
             <a:r>
               <a:rPr sz="1350" b="0" i="1">
                 <a:solidFill>
-                  <a:srgbClr val="9CA3AF"/>
+                  <a:srgbClr val="CBD5E1"/>
                 </a:solidFill>
                 <a:latin typeface="Calibri"/>
               </a:rPr>
@@ -8275,13 +8354,13 @@
       </p:sp>
       <p:sp>
         <p:nvSpPr>
-          <p:cNvPr id="5" name="TextBox 4"/>
-          <p:cNvSpPr txBox="1"/>
-          <p:nvPr/>
-        </p:nvSpPr>
-        <p:spPr>
-          <a:xfrm>
-            <a:off x="685800" y="1680210"/>
+          <p:cNvPr id="7" name="TextBox 6"/>
+          <p:cNvSpPr txBox="1"/>
+          <p:nvPr/>
+        </p:nvSpPr>
+        <p:spPr>
+          <a:xfrm>
+            <a:off x="582930" y="1851660"/>
             <a:ext cx="8229600" cy="274320"/>
           </a:xfrm>
           <a:prstGeom prst="rect">
@@ -8299,7 +8378,7 @@
             <a:r>
               <a:rPr sz="1050" b="1" i="0">
                 <a:solidFill>
-                  <a:srgbClr val="7B5CF5"/>
+                  <a:srgbClr val="EEE8FF"/>
                 </a:solidFill>
                 <a:latin typeface="Calibri"/>
               </a:rPr>
@@ -8310,14 +8389,14 @@
       </p:sp>
       <p:sp>
         <p:nvSpPr>
-          <p:cNvPr id="6" name="Rounded Rectangle 5"/>
+          <p:cNvPr id="8" name="Rounded Rectangle 7"/>
           <p:cNvSpPr/>
           <p:nvPr/>
         </p:nvSpPr>
         <p:spPr>
           <a:xfrm>
-            <a:off x="685800" y="2023110"/>
-            <a:ext cx="8126729" cy="493776"/>
+            <a:off x="685800" y="2194560"/>
+            <a:ext cx="8126729" cy="445770"/>
           </a:xfrm>
           <a:prstGeom prst="roundRect">
             <a:avLst>
@@ -8325,7 +8404,7 @@
             </a:avLst>
           </a:prstGeom>
           <a:solidFill>
-            <a:srgbClr val="1E203A"/>
+            <a:srgbClr val="242A44"/>
           </a:solidFill>
           <a:ln w="14287">
             <a:solidFill>
@@ -8358,14 +8437,14 @@
       </p:sp>
       <p:sp>
         <p:nvSpPr>
-          <p:cNvPr id="7" name="TextBox 6"/>
-          <p:cNvSpPr txBox="1"/>
-          <p:nvPr/>
-        </p:nvSpPr>
-        <p:spPr>
-          <a:xfrm>
-            <a:off x="822959" y="2023110"/>
-            <a:ext cx="480059" cy="493776"/>
+          <p:cNvPr id="9" name="TextBox 8"/>
+          <p:cNvSpPr txBox="1"/>
+          <p:nvPr/>
+        </p:nvSpPr>
+        <p:spPr>
+          <a:xfrm>
+            <a:off x="822959" y="2194560"/>
+            <a:ext cx="480059" cy="445770"/>
           </a:xfrm>
           <a:prstGeom prst="rect">
             <a:avLst/>
@@ -8393,14 +8472,14 @@
       </p:sp>
       <p:sp>
         <p:nvSpPr>
-          <p:cNvPr id="8" name="TextBox 7"/>
-          <p:cNvSpPr txBox="1"/>
-          <p:nvPr/>
-        </p:nvSpPr>
-        <p:spPr>
-          <a:xfrm>
-            <a:off x="1337310" y="2023110"/>
-            <a:ext cx="3086100" cy="493776"/>
+          <p:cNvPr id="10" name="TextBox 9"/>
+          <p:cNvSpPr txBox="1"/>
+          <p:nvPr/>
+        </p:nvSpPr>
+        <p:spPr>
+          <a:xfrm>
+            <a:off x="1337310" y="2194560"/>
+            <a:ext cx="3086100" cy="445770"/>
           </a:xfrm>
           <a:prstGeom prst="rect">
             <a:avLst/>
@@ -8428,14 +8507,14 @@
       </p:sp>
       <p:sp>
         <p:nvSpPr>
-          <p:cNvPr id="9" name="TextBox 8"/>
-          <p:cNvSpPr txBox="1"/>
-          <p:nvPr/>
-        </p:nvSpPr>
-        <p:spPr>
-          <a:xfrm>
-            <a:off x="4457700" y="2023110"/>
-            <a:ext cx="2331720" cy="493776"/>
+          <p:cNvPr id="11" name="TextBox 10"/>
+          <p:cNvSpPr txBox="1"/>
+          <p:nvPr/>
+        </p:nvSpPr>
+        <p:spPr>
+          <a:xfrm>
+            <a:off x="4457700" y="2194560"/>
+            <a:ext cx="2331720" cy="445770"/>
           </a:xfrm>
           <a:prstGeom prst="rect">
             <a:avLst/>
@@ -8463,14 +8542,14 @@
       </p:sp>
       <p:sp>
         <p:nvSpPr>
-          <p:cNvPr id="10" name="TextBox 9"/>
-          <p:cNvSpPr txBox="1"/>
-          <p:nvPr/>
-        </p:nvSpPr>
-        <p:spPr>
-          <a:xfrm>
-            <a:off x="6858000" y="2023110"/>
-            <a:ext cx="1062990" cy="493776"/>
+          <p:cNvPr id="12" name="TextBox 11"/>
+          <p:cNvSpPr txBox="1"/>
+          <p:nvPr/>
+        </p:nvSpPr>
+        <p:spPr>
+          <a:xfrm>
+            <a:off x="6858000" y="2194560"/>
+            <a:ext cx="1062990" cy="445770"/>
           </a:xfrm>
           <a:prstGeom prst="rect">
             <a:avLst/>
@@ -8498,14 +8577,14 @@
       </p:sp>
       <p:sp>
         <p:nvSpPr>
-          <p:cNvPr id="11" name="TextBox 10"/>
-          <p:cNvSpPr txBox="1"/>
-          <p:nvPr/>
-        </p:nvSpPr>
-        <p:spPr>
-          <a:xfrm>
-            <a:off x="7920990" y="2023110"/>
-            <a:ext cx="857250" cy="493776"/>
+          <p:cNvPr id="13" name="TextBox 12"/>
+          <p:cNvSpPr txBox="1"/>
+          <p:nvPr/>
+        </p:nvSpPr>
+        <p:spPr>
+          <a:xfrm>
+            <a:off x="7920990" y="2194560"/>
+            <a:ext cx="857250" cy="445770"/>
           </a:xfrm>
           <a:prstGeom prst="rect">
             <a:avLst/>
@@ -8533,14 +8612,14 @@
       </p:sp>
       <p:sp>
         <p:nvSpPr>
-          <p:cNvPr id="12" name="Rounded Rectangle 11"/>
+          <p:cNvPr id="14" name="Rounded Rectangle 13"/>
           <p:cNvSpPr/>
           <p:nvPr/>
         </p:nvSpPr>
         <p:spPr>
           <a:xfrm>
-            <a:off x="685800" y="2585466"/>
-            <a:ext cx="8126729" cy="493776"/>
+            <a:off x="685800" y="2695194"/>
+            <a:ext cx="8126729" cy="445770"/>
           </a:xfrm>
           <a:prstGeom prst="roundRect">
             <a:avLst>
@@ -8548,7 +8627,7 @@
             </a:avLst>
           </a:prstGeom>
           <a:solidFill>
-            <a:srgbClr val="1E203A"/>
+            <a:srgbClr val="242A44"/>
           </a:solidFill>
           <a:ln w="14287">
             <a:solidFill>
@@ -8581,14 +8660,14 @@
       </p:sp>
       <p:sp>
         <p:nvSpPr>
-          <p:cNvPr id="13" name="TextBox 12"/>
-          <p:cNvSpPr txBox="1"/>
-          <p:nvPr/>
-        </p:nvSpPr>
-        <p:spPr>
-          <a:xfrm>
-            <a:off x="822959" y="2585466"/>
-            <a:ext cx="480059" cy="493776"/>
+          <p:cNvPr id="15" name="TextBox 14"/>
+          <p:cNvSpPr txBox="1"/>
+          <p:nvPr/>
+        </p:nvSpPr>
+        <p:spPr>
+          <a:xfrm>
+            <a:off x="822959" y="2695194"/>
+            <a:ext cx="480059" cy="445770"/>
           </a:xfrm>
           <a:prstGeom prst="rect">
             <a:avLst/>
@@ -8616,14 +8695,14 @@
       </p:sp>
       <p:sp>
         <p:nvSpPr>
-          <p:cNvPr id="14" name="TextBox 13"/>
-          <p:cNvSpPr txBox="1"/>
-          <p:nvPr/>
-        </p:nvSpPr>
-        <p:spPr>
-          <a:xfrm>
-            <a:off x="1337310" y="2585466"/>
-            <a:ext cx="3086100" cy="493776"/>
+          <p:cNvPr id="16" name="TextBox 15"/>
+          <p:cNvSpPr txBox="1"/>
+          <p:nvPr/>
+        </p:nvSpPr>
+        <p:spPr>
+          <a:xfrm>
+            <a:off x="1337310" y="2695194"/>
+            <a:ext cx="3086100" cy="445770"/>
           </a:xfrm>
           <a:prstGeom prst="rect">
             <a:avLst/>
@@ -8651,14 +8730,14 @@
       </p:sp>
       <p:sp>
         <p:nvSpPr>
-          <p:cNvPr id="15" name="TextBox 14"/>
-          <p:cNvSpPr txBox="1"/>
-          <p:nvPr/>
-        </p:nvSpPr>
-        <p:spPr>
-          <a:xfrm>
-            <a:off x="4457700" y="2585466"/>
-            <a:ext cx="2331720" cy="493776"/>
+          <p:cNvPr id="17" name="TextBox 16"/>
+          <p:cNvSpPr txBox="1"/>
+          <p:nvPr/>
+        </p:nvSpPr>
+        <p:spPr>
+          <a:xfrm>
+            <a:off x="4457700" y="2695194"/>
+            <a:ext cx="2331720" cy="445770"/>
           </a:xfrm>
           <a:prstGeom prst="rect">
             <a:avLst/>
@@ -8686,14 +8765,14 @@
       </p:sp>
       <p:sp>
         <p:nvSpPr>
-          <p:cNvPr id="16" name="TextBox 15"/>
-          <p:cNvSpPr txBox="1"/>
-          <p:nvPr/>
-        </p:nvSpPr>
-        <p:spPr>
-          <a:xfrm>
-            <a:off x="6858000" y="2585466"/>
-            <a:ext cx="1062990" cy="493776"/>
+          <p:cNvPr id="18" name="TextBox 17"/>
+          <p:cNvSpPr txBox="1"/>
+          <p:nvPr/>
+        </p:nvSpPr>
+        <p:spPr>
+          <a:xfrm>
+            <a:off x="6858000" y="2695194"/>
+            <a:ext cx="1062990" cy="445770"/>
           </a:xfrm>
           <a:prstGeom prst="rect">
             <a:avLst/>
@@ -8721,14 +8800,14 @@
       </p:sp>
       <p:sp>
         <p:nvSpPr>
-          <p:cNvPr id="17" name="TextBox 16"/>
-          <p:cNvSpPr txBox="1"/>
-          <p:nvPr/>
-        </p:nvSpPr>
-        <p:spPr>
-          <a:xfrm>
-            <a:off x="7920990" y="2585466"/>
-            <a:ext cx="857250" cy="493776"/>
+          <p:cNvPr id="19" name="TextBox 18"/>
+          <p:cNvSpPr txBox="1"/>
+          <p:nvPr/>
+        </p:nvSpPr>
+        <p:spPr>
+          <a:xfrm>
+            <a:off x="7920990" y="2695194"/>
+            <a:ext cx="857250" cy="445770"/>
           </a:xfrm>
           <a:prstGeom prst="rect">
             <a:avLst/>
@@ -8756,14 +8835,14 @@
       </p:sp>
       <p:sp>
         <p:nvSpPr>
-          <p:cNvPr id="18" name="Rounded Rectangle 17"/>
+          <p:cNvPr id="20" name="Rounded Rectangle 19"/>
           <p:cNvSpPr/>
           <p:nvPr/>
         </p:nvSpPr>
         <p:spPr>
           <a:xfrm>
-            <a:off x="685800" y="3147822"/>
-            <a:ext cx="8126729" cy="493776"/>
+            <a:off x="685800" y="3195828"/>
+            <a:ext cx="8126729" cy="445770"/>
           </a:xfrm>
           <a:prstGeom prst="roundRect">
             <a:avLst>
@@ -8771,7 +8850,7 @@
             </a:avLst>
           </a:prstGeom>
           <a:solidFill>
-            <a:srgbClr val="1E203A"/>
+            <a:srgbClr val="242A44"/>
           </a:solidFill>
           <a:ln w="14287">
             <a:solidFill>
@@ -8804,14 +8883,14 @@
       </p:sp>
       <p:sp>
         <p:nvSpPr>
-          <p:cNvPr id="19" name="TextBox 18"/>
-          <p:cNvSpPr txBox="1"/>
-          <p:nvPr/>
-        </p:nvSpPr>
-        <p:spPr>
-          <a:xfrm>
-            <a:off x="822959" y="3147822"/>
-            <a:ext cx="480059" cy="493776"/>
+          <p:cNvPr id="21" name="TextBox 20"/>
+          <p:cNvSpPr txBox="1"/>
+          <p:nvPr/>
+        </p:nvSpPr>
+        <p:spPr>
+          <a:xfrm>
+            <a:off x="822959" y="3195828"/>
+            <a:ext cx="480059" cy="445770"/>
           </a:xfrm>
           <a:prstGeom prst="rect">
             <a:avLst/>
@@ -8839,14 +8918,14 @@
       </p:sp>
       <p:sp>
         <p:nvSpPr>
-          <p:cNvPr id="20" name="TextBox 19"/>
-          <p:cNvSpPr txBox="1"/>
-          <p:nvPr/>
-        </p:nvSpPr>
-        <p:spPr>
-          <a:xfrm>
-            <a:off x="1337310" y="3147822"/>
-            <a:ext cx="3086100" cy="493776"/>
+          <p:cNvPr id="22" name="TextBox 21"/>
+          <p:cNvSpPr txBox="1"/>
+          <p:nvPr/>
+        </p:nvSpPr>
+        <p:spPr>
+          <a:xfrm>
+            <a:off x="1337310" y="3195828"/>
+            <a:ext cx="3086100" cy="445770"/>
           </a:xfrm>
           <a:prstGeom prst="rect">
             <a:avLst/>
@@ -8874,14 +8953,14 @@
       </p:sp>
       <p:sp>
         <p:nvSpPr>
-          <p:cNvPr id="21" name="TextBox 20"/>
-          <p:cNvSpPr txBox="1"/>
-          <p:nvPr/>
-        </p:nvSpPr>
-        <p:spPr>
-          <a:xfrm>
-            <a:off x="4457700" y="3147822"/>
-            <a:ext cx="2331720" cy="493776"/>
+          <p:cNvPr id="23" name="TextBox 22"/>
+          <p:cNvSpPr txBox="1"/>
+          <p:nvPr/>
+        </p:nvSpPr>
+        <p:spPr>
+          <a:xfrm>
+            <a:off x="4457700" y="3195828"/>
+            <a:ext cx="2331720" cy="445770"/>
           </a:xfrm>
           <a:prstGeom prst="rect">
             <a:avLst/>
@@ -8909,14 +8988,14 @@
       </p:sp>
       <p:sp>
         <p:nvSpPr>
-          <p:cNvPr id="22" name="TextBox 21"/>
-          <p:cNvSpPr txBox="1"/>
-          <p:nvPr/>
-        </p:nvSpPr>
-        <p:spPr>
-          <a:xfrm>
-            <a:off x="6858000" y="3147822"/>
-            <a:ext cx="1062990" cy="493776"/>
+          <p:cNvPr id="24" name="TextBox 23"/>
+          <p:cNvSpPr txBox="1"/>
+          <p:nvPr/>
+        </p:nvSpPr>
+        <p:spPr>
+          <a:xfrm>
+            <a:off x="6858000" y="3195828"/>
+            <a:ext cx="1062990" cy="445770"/>
           </a:xfrm>
           <a:prstGeom prst="rect">
             <a:avLst/>
@@ -8944,14 +9023,14 @@
       </p:sp>
       <p:sp>
         <p:nvSpPr>
-          <p:cNvPr id="23" name="TextBox 22"/>
-          <p:cNvSpPr txBox="1"/>
-          <p:nvPr/>
-        </p:nvSpPr>
-        <p:spPr>
-          <a:xfrm>
-            <a:off x="7920990" y="3147822"/>
-            <a:ext cx="857250" cy="493776"/>
+          <p:cNvPr id="25" name="TextBox 24"/>
+          <p:cNvSpPr txBox="1"/>
+          <p:nvPr/>
+        </p:nvSpPr>
+        <p:spPr>
+          <a:xfrm>
+            <a:off x="7920990" y="3195828"/>
+            <a:ext cx="857250" cy="445770"/>
           </a:xfrm>
           <a:prstGeom prst="rect">
             <a:avLst/>
@@ -8979,14 +9058,14 @@
       </p:sp>
       <p:sp>
         <p:nvSpPr>
-          <p:cNvPr id="24" name="Rounded Rectangle 23"/>
+          <p:cNvPr id="26" name="Rounded Rectangle 25"/>
           <p:cNvSpPr/>
           <p:nvPr/>
         </p:nvSpPr>
         <p:spPr>
           <a:xfrm>
-            <a:off x="685800" y="3710178"/>
-            <a:ext cx="8126729" cy="493776"/>
+            <a:off x="685800" y="3696462"/>
+            <a:ext cx="8126729" cy="445770"/>
           </a:xfrm>
           <a:prstGeom prst="roundRect">
             <a:avLst>
@@ -8994,7 +9073,7 @@
             </a:avLst>
           </a:prstGeom>
           <a:solidFill>
-            <a:srgbClr val="1E203A"/>
+            <a:srgbClr val="242A44"/>
           </a:solidFill>
           <a:ln w="14287">
             <a:solidFill>
@@ -9027,14 +9106,14 @@
       </p:sp>
       <p:sp>
         <p:nvSpPr>
-          <p:cNvPr id="25" name="TextBox 24"/>
-          <p:cNvSpPr txBox="1"/>
-          <p:nvPr/>
-        </p:nvSpPr>
-        <p:spPr>
-          <a:xfrm>
-            <a:off x="822959" y="3710178"/>
-            <a:ext cx="480059" cy="493776"/>
+          <p:cNvPr id="27" name="TextBox 26"/>
+          <p:cNvSpPr txBox="1"/>
+          <p:nvPr/>
+        </p:nvSpPr>
+        <p:spPr>
+          <a:xfrm>
+            <a:off x="822959" y="3696462"/>
+            <a:ext cx="480059" cy="445770"/>
           </a:xfrm>
           <a:prstGeom prst="rect">
             <a:avLst/>
@@ -9062,14 +9141,14 @@
       </p:sp>
       <p:sp>
         <p:nvSpPr>
-          <p:cNvPr id="26" name="TextBox 25"/>
-          <p:cNvSpPr txBox="1"/>
-          <p:nvPr/>
-        </p:nvSpPr>
-        <p:spPr>
-          <a:xfrm>
-            <a:off x="1337310" y="3710178"/>
-            <a:ext cx="3086100" cy="493776"/>
+          <p:cNvPr id="28" name="TextBox 27"/>
+          <p:cNvSpPr txBox="1"/>
+          <p:nvPr/>
+        </p:nvSpPr>
+        <p:spPr>
+          <a:xfrm>
+            <a:off x="1337310" y="3696462"/>
+            <a:ext cx="3086100" cy="445770"/>
           </a:xfrm>
           <a:prstGeom prst="rect">
             <a:avLst/>
@@ -9097,14 +9176,14 @@
       </p:sp>
       <p:sp>
         <p:nvSpPr>
-          <p:cNvPr id="27" name="TextBox 26"/>
-          <p:cNvSpPr txBox="1"/>
-          <p:nvPr/>
-        </p:nvSpPr>
-        <p:spPr>
-          <a:xfrm>
-            <a:off x="4457700" y="3710178"/>
-            <a:ext cx="2331720" cy="493776"/>
+          <p:cNvPr id="29" name="TextBox 28"/>
+          <p:cNvSpPr txBox="1"/>
+          <p:nvPr/>
+        </p:nvSpPr>
+        <p:spPr>
+          <a:xfrm>
+            <a:off x="4457700" y="3696462"/>
+            <a:ext cx="2331720" cy="445770"/>
           </a:xfrm>
           <a:prstGeom prst="rect">
             <a:avLst/>
@@ -9132,14 +9211,14 @@
       </p:sp>
       <p:sp>
         <p:nvSpPr>
-          <p:cNvPr id="28" name="TextBox 27"/>
-          <p:cNvSpPr txBox="1"/>
-          <p:nvPr/>
-        </p:nvSpPr>
-        <p:spPr>
-          <a:xfrm>
-            <a:off x="6858000" y="3710178"/>
-            <a:ext cx="1062990" cy="493776"/>
+          <p:cNvPr id="30" name="TextBox 29"/>
+          <p:cNvSpPr txBox="1"/>
+          <p:nvPr/>
+        </p:nvSpPr>
+        <p:spPr>
+          <a:xfrm>
+            <a:off x="6858000" y="3696462"/>
+            <a:ext cx="1062990" cy="445770"/>
           </a:xfrm>
           <a:prstGeom prst="rect">
             <a:avLst/>
@@ -9167,14 +9246,14 @@
       </p:sp>
       <p:sp>
         <p:nvSpPr>
-          <p:cNvPr id="29" name="TextBox 28"/>
-          <p:cNvSpPr txBox="1"/>
-          <p:nvPr/>
-        </p:nvSpPr>
-        <p:spPr>
-          <a:xfrm>
-            <a:off x="7920990" y="3710178"/>
-            <a:ext cx="857250" cy="493776"/>
+          <p:cNvPr id="31" name="TextBox 30"/>
+          <p:cNvSpPr txBox="1"/>
+          <p:nvPr/>
+        </p:nvSpPr>
+        <p:spPr>
+          <a:xfrm>
+            <a:off x="7920990" y="3696462"/>
+            <a:ext cx="857250" cy="445770"/>
           </a:xfrm>
           <a:prstGeom prst="rect">
             <a:avLst/>
@@ -9202,14 +9281,14 @@
       </p:sp>
       <p:sp>
         <p:nvSpPr>
-          <p:cNvPr id="30" name="Rounded Rectangle 29"/>
+          <p:cNvPr id="32" name="Rounded Rectangle 31"/>
           <p:cNvSpPr/>
           <p:nvPr/>
         </p:nvSpPr>
         <p:spPr>
           <a:xfrm>
-            <a:off x="685800" y="4272534"/>
-            <a:ext cx="8126729" cy="493776"/>
+            <a:off x="685800" y="4197096"/>
+            <a:ext cx="8126729" cy="445770"/>
           </a:xfrm>
           <a:prstGeom prst="roundRect">
             <a:avLst>
@@ -9217,7 +9296,7 @@
             </a:avLst>
           </a:prstGeom>
           <a:solidFill>
-            <a:srgbClr val="1E203A"/>
+            <a:srgbClr val="242A44"/>
           </a:solidFill>
           <a:ln w="14287">
             <a:solidFill>
@@ -9250,14 +9329,14 @@
       </p:sp>
       <p:sp>
         <p:nvSpPr>
-          <p:cNvPr id="31" name="TextBox 30"/>
-          <p:cNvSpPr txBox="1"/>
-          <p:nvPr/>
-        </p:nvSpPr>
-        <p:spPr>
-          <a:xfrm>
-            <a:off x="822959" y="4272534"/>
-            <a:ext cx="480059" cy="493776"/>
+          <p:cNvPr id="33" name="TextBox 32"/>
+          <p:cNvSpPr txBox="1"/>
+          <p:nvPr/>
+        </p:nvSpPr>
+        <p:spPr>
+          <a:xfrm>
+            <a:off x="822959" y="4197096"/>
+            <a:ext cx="480059" cy="445770"/>
           </a:xfrm>
           <a:prstGeom prst="rect">
             <a:avLst/>
@@ -9285,14 +9364,14 @@
       </p:sp>
       <p:sp>
         <p:nvSpPr>
-          <p:cNvPr id="32" name="TextBox 31"/>
-          <p:cNvSpPr txBox="1"/>
-          <p:nvPr/>
-        </p:nvSpPr>
-        <p:spPr>
-          <a:xfrm>
-            <a:off x="1337310" y="4272534"/>
-            <a:ext cx="3086100" cy="493776"/>
+          <p:cNvPr id="34" name="TextBox 33"/>
+          <p:cNvSpPr txBox="1"/>
+          <p:nvPr/>
+        </p:nvSpPr>
+        <p:spPr>
+          <a:xfrm>
+            <a:off x="1337310" y="4197096"/>
+            <a:ext cx="3086100" cy="445770"/>
           </a:xfrm>
           <a:prstGeom prst="rect">
             <a:avLst/>
@@ -9320,14 +9399,14 @@
       </p:sp>
       <p:sp>
         <p:nvSpPr>
-          <p:cNvPr id="33" name="TextBox 32"/>
-          <p:cNvSpPr txBox="1"/>
-          <p:nvPr/>
-        </p:nvSpPr>
-        <p:spPr>
-          <a:xfrm>
-            <a:off x="4457700" y="4272534"/>
-            <a:ext cx="2331720" cy="493776"/>
+          <p:cNvPr id="35" name="TextBox 34"/>
+          <p:cNvSpPr txBox="1"/>
+          <p:nvPr/>
+        </p:nvSpPr>
+        <p:spPr>
+          <a:xfrm>
+            <a:off x="4457700" y="4197096"/>
+            <a:ext cx="2331720" cy="445770"/>
           </a:xfrm>
           <a:prstGeom prst="rect">
             <a:avLst/>
@@ -9355,14 +9434,14 @@
       </p:sp>
       <p:sp>
         <p:nvSpPr>
-          <p:cNvPr id="34" name="TextBox 33"/>
-          <p:cNvSpPr txBox="1"/>
-          <p:nvPr/>
-        </p:nvSpPr>
-        <p:spPr>
-          <a:xfrm>
-            <a:off x="6858000" y="4272534"/>
-            <a:ext cx="1062990" cy="493776"/>
+          <p:cNvPr id="36" name="TextBox 35"/>
+          <p:cNvSpPr txBox="1"/>
+          <p:nvPr/>
+        </p:nvSpPr>
+        <p:spPr>
+          <a:xfrm>
+            <a:off x="6858000" y="4197096"/>
+            <a:ext cx="1062990" cy="445770"/>
           </a:xfrm>
           <a:prstGeom prst="rect">
             <a:avLst/>
@@ -9390,14 +9469,14 @@
       </p:sp>
       <p:sp>
         <p:nvSpPr>
-          <p:cNvPr id="35" name="TextBox 34"/>
-          <p:cNvSpPr txBox="1"/>
-          <p:nvPr/>
-        </p:nvSpPr>
-        <p:spPr>
-          <a:xfrm>
-            <a:off x="7920990" y="4272534"/>
-            <a:ext cx="857250" cy="493776"/>
+          <p:cNvPr id="37" name="TextBox 36"/>
+          <p:cNvSpPr txBox="1"/>
+          <p:nvPr/>
+        </p:nvSpPr>
+        <p:spPr>
+          <a:xfrm>
+            <a:off x="7920990" y="4197096"/>
+            <a:ext cx="857250" cy="445770"/>
           </a:xfrm>
           <a:prstGeom prst="rect">
             <a:avLst/>
@@ -9425,14 +9504,14 @@
       </p:sp>
       <p:sp>
         <p:nvSpPr>
-          <p:cNvPr id="36" name="TextBox 35"/>
-          <p:cNvSpPr txBox="1"/>
-          <p:nvPr/>
-        </p:nvSpPr>
-        <p:spPr>
-          <a:xfrm>
-            <a:off x="7955279" y="4766310"/>
-            <a:ext cx="1028700" cy="240029"/>
+          <p:cNvPr id="38" name="TextBox 37"/>
+          <p:cNvSpPr txBox="1"/>
+          <p:nvPr/>
+        </p:nvSpPr>
+        <p:spPr>
+          <a:xfrm>
+            <a:off x="7543800" y="4800600"/>
+            <a:ext cx="1371600" cy="274320"/>
           </a:xfrm>
           <a:prstGeom prst="rect">
             <a:avLst/>
@@ -9447,11 +9526,11 @@
           <a:p>
             <a:pPr algn="r"/>
             <a:r>
-              <a:rPr sz="1050" b="0" i="0">
-                <a:solidFill>
-                  <a:srgbClr val="9CA3AF"/>
-                </a:solidFill>
-                <a:latin typeface="Calibri"/>
+              <a:rPr sz="900" b="0" i="0">
+                <a:solidFill>
+                  <a:srgbClr val="CBD5E1"/>
+                </a:solidFill>
+                <a:latin typeface="Consolas"/>
               </a:rPr>
               <a:t>7 / 8</a:t>
             </a:r>
@@ -9593,7 +9672,7 @@
                 </a:solidFill>
                 <a:latin typeface="Calibri"/>
               </a:rPr>
-              <a:t>05 · ①   S T R A T E G I E S   ·   回 看</a:t>
+              <a:t>05 · ①   S T R A T E G I E S · 回看</a:t>
             </a:r>
           </a:p>
         </p:txBody>
@@ -10229,11 +10308,11 @@
             <a:r>
               <a:rPr sz="975" b="0" i="0">
                 <a:solidFill>
-                  <a:srgbClr val="9CA3AF"/>
+                  <a:srgbClr val="FB7048"/>
                 </a:solidFill>
                 <a:latin typeface="Calibri"/>
               </a:rPr>
-              <a:t>成本最高、難 debug</a:t>
+              <a:t>⚠ 成本最高、難 debug</a:t>
             </a:r>
           </a:p>
         </p:txBody>

--- a/03-agentic-tool-loop.pptx
+++ b/03-agentic-tool-loop.pptx
@@ -10312,7 +10312,7 @@
                 </a:solidFill>
                 <a:latin typeface="Calibri"/>
               </a:rPr>
-              <a:t>⚠ 成本最高、難 debug</a:t>
+              <a:t>△  成本最高、難 debug</a:t>
             </a:r>
           </a:p>
         </p:txBody>
